--- a/library/lectures/lec-02/rendered/lec-02-en.pptx
+++ b/library/lectures/lec-02/rendered/lec-02-en.pptx
@@ -6856,45 +6856,6 @@
           </a:p>
         </p:txBody>
       </p:sp>
-      <p:sp>
-        <p:nvSpPr>
-          <p:cNvPr id="7" name="TextBox 6"/>
-          <p:cNvSpPr txBox="1"/>
-          <p:nvPr/>
-        </p:nvSpPr>
-        <p:spPr>
-          <a:xfrm>
-            <a:off x="11274552" y="6547104"/>
-            <a:ext cx="868680" cy="256032"/>
-          </a:xfrm>
-          <a:prstGeom prst="rect">
-            <a:avLst/>
-          </a:prstGeom>
-          <a:noFill/>
-        </p:spPr>
-        <p:txBody>
-          <a:bodyPr wrap="none" lIns="0" rIns="0" tIns="0" bIns="0">
-            <a:spAutoFit/>
-          </a:bodyPr>
-          <a:lstStyle/>
-          <a:p>
-            <a:pPr algn="r">
-              <a:lnSpc>
-                <a:spcPct val="100000"/>
-              </a:lnSpc>
-            </a:pPr>
-            <a:r>
-              <a:rPr sz="1000" i="1">
-                <a:solidFill>
-                  <a:srgbClr val="5B6678"/>
-                </a:solidFill>
-                <a:latin typeface="Arial"/>
-              </a:rPr>
-              <a:t>1 / 35</a:t>
-            </a:r>
-          </a:p>
-        </p:txBody>
-      </p:sp>
     </p:spTree>
   </p:cSld>
   <p:clrMapOvr>
@@ -7588,45 +7549,6 @@
           </a:p>
         </p:txBody>
       </p:sp>
-      <p:sp>
-        <p:nvSpPr>
-          <p:cNvPr id="18" name="TextBox 17"/>
-          <p:cNvSpPr txBox="1"/>
-          <p:nvPr/>
-        </p:nvSpPr>
-        <p:spPr>
-          <a:xfrm>
-            <a:off x="11274552" y="6547104"/>
-            <a:ext cx="868680" cy="256032"/>
-          </a:xfrm>
-          <a:prstGeom prst="rect">
-            <a:avLst/>
-          </a:prstGeom>
-          <a:noFill/>
-        </p:spPr>
-        <p:txBody>
-          <a:bodyPr wrap="none" lIns="0" rIns="0" tIns="0" bIns="0">
-            <a:spAutoFit/>
-          </a:bodyPr>
-          <a:lstStyle/>
-          <a:p>
-            <a:pPr algn="r">
-              <a:lnSpc>
-                <a:spcPct val="100000"/>
-              </a:lnSpc>
-            </a:pPr>
-            <a:r>
-              <a:rPr sz="1000" i="1">
-                <a:solidFill>
-                  <a:srgbClr val="5B6678"/>
-                </a:solidFill>
-                <a:latin typeface="Arial"/>
-              </a:rPr>
-              <a:t>10 / 35</a:t>
-            </a:r>
-          </a:p>
-        </p:txBody>
-      </p:sp>
     </p:spTree>
   </p:cSld>
   <p:clrMapOvr>
@@ -8277,45 +8199,6 @@
                 <a:latin typeface="Arial"/>
               </a:rPr>
               <a:t>API cost for RU ~ 2x EN. For batch — translate to EN where acceptable.</a:t>
-            </a:r>
-          </a:p>
-        </p:txBody>
-      </p:sp>
-      <p:sp>
-        <p:nvSpPr>
-          <p:cNvPr id="18" name="TextBox 17"/>
-          <p:cNvSpPr txBox="1"/>
-          <p:nvPr/>
-        </p:nvSpPr>
-        <p:spPr>
-          <a:xfrm>
-            <a:off x="11274552" y="6547104"/>
-            <a:ext cx="868680" cy="256032"/>
-          </a:xfrm>
-          <a:prstGeom prst="rect">
-            <a:avLst/>
-          </a:prstGeom>
-          <a:noFill/>
-        </p:spPr>
-        <p:txBody>
-          <a:bodyPr wrap="none" lIns="0" rIns="0" tIns="0" bIns="0">
-            <a:spAutoFit/>
-          </a:bodyPr>
-          <a:lstStyle/>
-          <a:p>
-            <a:pPr algn="r">
-              <a:lnSpc>
-                <a:spcPct val="100000"/>
-              </a:lnSpc>
-            </a:pPr>
-            <a:r>
-              <a:rPr sz="1000" i="1">
-                <a:solidFill>
-                  <a:srgbClr val="5B6678"/>
-                </a:solidFill>
-                <a:latin typeface="Arial"/>
-              </a:rPr>
-              <a:t>11 / 35</a:t>
             </a:r>
           </a:p>
         </p:txBody>
@@ -8973,45 +8856,6 @@
           </a:p>
         </p:txBody>
       </p:sp>
-      <p:sp>
-        <p:nvSpPr>
-          <p:cNvPr id="17" name="TextBox 16"/>
-          <p:cNvSpPr txBox="1"/>
-          <p:nvPr/>
-        </p:nvSpPr>
-        <p:spPr>
-          <a:xfrm>
-            <a:off x="11274552" y="6547104"/>
-            <a:ext cx="868680" cy="256032"/>
-          </a:xfrm>
-          <a:prstGeom prst="rect">
-            <a:avLst/>
-          </a:prstGeom>
-          <a:noFill/>
-        </p:spPr>
-        <p:txBody>
-          <a:bodyPr wrap="none" lIns="0" rIns="0" tIns="0" bIns="0">
-            <a:spAutoFit/>
-          </a:bodyPr>
-          <a:lstStyle/>
-          <a:p>
-            <a:pPr algn="r">
-              <a:lnSpc>
-                <a:spcPct val="100000"/>
-              </a:lnSpc>
-            </a:pPr>
-            <a:r>
-              <a:rPr sz="1000" i="1">
-                <a:solidFill>
-                  <a:srgbClr val="5B6678"/>
-                </a:solidFill>
-                <a:latin typeface="Arial"/>
-              </a:rPr>
-              <a:t>12 / 35</a:t>
-            </a:r>
-          </a:p>
-        </p:txBody>
-      </p:sp>
     </p:spTree>
   </p:cSld>
   <p:clrMapOvr>
@@ -9660,45 +9504,6 @@
           </a:p>
         </p:txBody>
       </p:sp>
-      <p:sp>
-        <p:nvSpPr>
-          <p:cNvPr id="16" name="TextBox 15"/>
-          <p:cNvSpPr txBox="1"/>
-          <p:nvPr/>
-        </p:nvSpPr>
-        <p:spPr>
-          <a:xfrm>
-            <a:off x="11274552" y="6547104"/>
-            <a:ext cx="868680" cy="256032"/>
-          </a:xfrm>
-          <a:prstGeom prst="rect">
-            <a:avLst/>
-          </a:prstGeom>
-          <a:noFill/>
-        </p:spPr>
-        <p:txBody>
-          <a:bodyPr wrap="none" lIns="0" rIns="0" tIns="0" bIns="0">
-            <a:spAutoFit/>
-          </a:bodyPr>
-          <a:lstStyle/>
-          <a:p>
-            <a:pPr algn="r">
-              <a:lnSpc>
-                <a:spcPct val="100000"/>
-              </a:lnSpc>
-            </a:pPr>
-            <a:r>
-              <a:rPr sz="1000" i="1">
-                <a:solidFill>
-                  <a:srgbClr val="5B6678"/>
-                </a:solidFill>
-                <a:latin typeface="Arial"/>
-              </a:rPr>
-              <a:t>13 / 35</a:t>
-            </a:r>
-          </a:p>
-        </p:txBody>
-      </p:sp>
     </p:spTree>
   </p:cSld>
   <p:clrMapOvr>
@@ -10592,45 +10397,6 @@
           </a:p>
         </p:txBody>
       </p:sp>
-      <p:sp>
-        <p:nvSpPr>
-          <p:cNvPr id="23" name="TextBox 22"/>
-          <p:cNvSpPr txBox="1"/>
-          <p:nvPr/>
-        </p:nvSpPr>
-        <p:spPr>
-          <a:xfrm>
-            <a:off x="11274552" y="6547104"/>
-            <a:ext cx="868680" cy="256032"/>
-          </a:xfrm>
-          <a:prstGeom prst="rect">
-            <a:avLst/>
-          </a:prstGeom>
-          <a:noFill/>
-        </p:spPr>
-        <p:txBody>
-          <a:bodyPr wrap="none" lIns="0" rIns="0" tIns="0" bIns="0">
-            <a:spAutoFit/>
-          </a:bodyPr>
-          <a:lstStyle/>
-          <a:p>
-            <a:pPr algn="r">
-              <a:lnSpc>
-                <a:spcPct val="100000"/>
-              </a:lnSpc>
-            </a:pPr>
-            <a:r>
-              <a:rPr sz="1000" i="1">
-                <a:solidFill>
-                  <a:srgbClr val="5B6678"/>
-                </a:solidFill>
-                <a:latin typeface="Arial"/>
-              </a:rPr>
-              <a:t>14 / 35</a:t>
-            </a:r>
-          </a:p>
-        </p:txBody>
-      </p:sp>
     </p:spTree>
   </p:cSld>
   <p:clrMapOvr>
@@ -11018,45 +10784,6 @@
           </a:p>
         </p:txBody>
       </p:sp>
-      <p:sp>
-        <p:nvSpPr>
-          <p:cNvPr id="11" name="TextBox 10"/>
-          <p:cNvSpPr txBox="1"/>
-          <p:nvPr/>
-        </p:nvSpPr>
-        <p:spPr>
-          <a:xfrm>
-            <a:off x="11274552" y="6547104"/>
-            <a:ext cx="868680" cy="256032"/>
-          </a:xfrm>
-          <a:prstGeom prst="rect">
-            <a:avLst/>
-          </a:prstGeom>
-          <a:noFill/>
-        </p:spPr>
-        <p:txBody>
-          <a:bodyPr wrap="none" lIns="0" rIns="0" tIns="0" bIns="0">
-            <a:spAutoFit/>
-          </a:bodyPr>
-          <a:lstStyle/>
-          <a:p>
-            <a:pPr algn="r">
-              <a:lnSpc>
-                <a:spcPct val="100000"/>
-              </a:lnSpc>
-            </a:pPr>
-            <a:r>
-              <a:rPr sz="1000" i="1">
-                <a:solidFill>
-                  <a:srgbClr val="5B6678"/>
-                </a:solidFill>
-                <a:latin typeface="Arial"/>
-              </a:rPr>
-              <a:t>15 / 35</a:t>
-            </a:r>
-          </a:p>
-        </p:txBody>
-      </p:sp>
     </p:spTree>
   </p:cSld>
   <p:clrMapOvr>
@@ -12679,45 +12406,6 @@
                 <a:hlinkClick r:id="rId5"/>
               </a:rPr>
               <a:t>Lewis et al. (2020) — RAG</a:t>
-            </a:r>
-          </a:p>
-        </p:txBody>
-      </p:sp>
-      <p:sp>
-        <p:nvSpPr>
-          <p:cNvPr id="40" name="TextBox 39"/>
-          <p:cNvSpPr txBox="1"/>
-          <p:nvPr/>
-        </p:nvSpPr>
-        <p:spPr>
-          <a:xfrm>
-            <a:off x="11274552" y="6547104"/>
-            <a:ext cx="868680" cy="256032"/>
-          </a:xfrm>
-          <a:prstGeom prst="rect">
-            <a:avLst/>
-          </a:prstGeom>
-          <a:noFill/>
-        </p:spPr>
-        <p:txBody>
-          <a:bodyPr wrap="none" lIns="0" rIns="0" tIns="0" bIns="0">
-            <a:spAutoFit/>
-          </a:bodyPr>
-          <a:lstStyle/>
-          <a:p>
-            <a:pPr algn="r">
-              <a:lnSpc>
-                <a:spcPct val="100000"/>
-              </a:lnSpc>
-            </a:pPr>
-            <a:r>
-              <a:rPr sz="1000" i="1">
-                <a:solidFill>
-                  <a:srgbClr val="5B6678"/>
-                </a:solidFill>
-                <a:latin typeface="Arial"/>
-              </a:rPr>
-              <a:t>16 / 35</a:t>
             </a:r>
           </a:p>
         </p:txBody>
@@ -13375,45 +13063,6 @@
           </a:p>
         </p:txBody>
       </p:sp>
-      <p:sp>
-        <p:nvSpPr>
-          <p:cNvPr id="17" name="TextBox 16"/>
-          <p:cNvSpPr txBox="1"/>
-          <p:nvPr/>
-        </p:nvSpPr>
-        <p:spPr>
-          <a:xfrm>
-            <a:off x="11274552" y="6547104"/>
-            <a:ext cx="868680" cy="256032"/>
-          </a:xfrm>
-          <a:prstGeom prst="rect">
-            <a:avLst/>
-          </a:prstGeom>
-          <a:noFill/>
-        </p:spPr>
-        <p:txBody>
-          <a:bodyPr wrap="none" lIns="0" rIns="0" tIns="0" bIns="0">
-            <a:spAutoFit/>
-          </a:bodyPr>
-          <a:lstStyle/>
-          <a:p>
-            <a:pPr algn="r">
-              <a:lnSpc>
-                <a:spcPct val="100000"/>
-              </a:lnSpc>
-            </a:pPr>
-            <a:r>
-              <a:rPr sz="1000" i="1">
-                <a:solidFill>
-                  <a:srgbClr val="5B6678"/>
-                </a:solidFill>
-                <a:latin typeface="Arial"/>
-              </a:rPr>
-              <a:t>17 / 35</a:t>
-            </a:r>
-          </a:p>
-        </p:txBody>
-      </p:sp>
     </p:spTree>
   </p:cSld>
   <p:clrMapOvr>
@@ -14307,45 +13956,6 @@
           </a:p>
         </p:txBody>
       </p:sp>
-      <p:sp>
-        <p:nvSpPr>
-          <p:cNvPr id="23" name="TextBox 22"/>
-          <p:cNvSpPr txBox="1"/>
-          <p:nvPr/>
-        </p:nvSpPr>
-        <p:spPr>
-          <a:xfrm>
-            <a:off x="11274552" y="6547104"/>
-            <a:ext cx="868680" cy="256032"/>
-          </a:xfrm>
-          <a:prstGeom prst="rect">
-            <a:avLst/>
-          </a:prstGeom>
-          <a:noFill/>
-        </p:spPr>
-        <p:txBody>
-          <a:bodyPr wrap="none" lIns="0" rIns="0" tIns="0" bIns="0">
-            <a:spAutoFit/>
-          </a:bodyPr>
-          <a:lstStyle/>
-          <a:p>
-            <a:pPr algn="r">
-              <a:lnSpc>
-                <a:spcPct val="100000"/>
-              </a:lnSpc>
-            </a:pPr>
-            <a:r>
-              <a:rPr sz="1000" i="1">
-                <a:solidFill>
-                  <a:srgbClr val="5B6678"/>
-                </a:solidFill>
-                <a:latin typeface="Arial"/>
-              </a:rPr>
-              <a:t>18 / 35</a:t>
-            </a:r>
-          </a:p>
-        </p:txBody>
-      </p:sp>
     </p:spTree>
   </p:cSld>
   <p:clrMapOvr>
@@ -15183,45 +14793,6 @@
                 <a:hlinkClick r:id="rId4"/>
               </a:rPr>
               <a:t>Vaswani et al. (2017) — Attention Is All You Need</a:t>
-            </a:r>
-          </a:p>
-        </p:txBody>
-      </p:sp>
-      <p:sp>
-        <p:nvSpPr>
-          <p:cNvPr id="22" name="TextBox 21"/>
-          <p:cNvSpPr txBox="1"/>
-          <p:nvPr/>
-        </p:nvSpPr>
-        <p:spPr>
-          <a:xfrm>
-            <a:off x="11274552" y="6547104"/>
-            <a:ext cx="868680" cy="256032"/>
-          </a:xfrm>
-          <a:prstGeom prst="rect">
-            <a:avLst/>
-          </a:prstGeom>
-          <a:noFill/>
-        </p:spPr>
-        <p:txBody>
-          <a:bodyPr wrap="none" lIns="0" rIns="0" tIns="0" bIns="0">
-            <a:spAutoFit/>
-          </a:bodyPr>
-          <a:lstStyle/>
-          <a:p>
-            <a:pPr algn="r">
-              <a:lnSpc>
-                <a:spcPct val="100000"/>
-              </a:lnSpc>
-            </a:pPr>
-            <a:r>
-              <a:rPr sz="1000" i="1">
-                <a:solidFill>
-                  <a:srgbClr val="5B6678"/>
-                </a:solidFill>
-                <a:latin typeface="Arial"/>
-              </a:rPr>
-              <a:t>19 / 35</a:t>
             </a:r>
           </a:p>
         </p:txBody>
@@ -15954,45 +15525,6 @@
           </a:p>
         </p:txBody>
       </p:sp>
-      <p:sp>
-        <p:nvSpPr>
-          <p:cNvPr id="19" name="TextBox 18"/>
-          <p:cNvSpPr txBox="1"/>
-          <p:nvPr/>
-        </p:nvSpPr>
-        <p:spPr>
-          <a:xfrm>
-            <a:off x="11274552" y="6547104"/>
-            <a:ext cx="868680" cy="256032"/>
-          </a:xfrm>
-          <a:prstGeom prst="rect">
-            <a:avLst/>
-          </a:prstGeom>
-          <a:noFill/>
-        </p:spPr>
-        <p:txBody>
-          <a:bodyPr wrap="none" lIns="0" rIns="0" tIns="0" bIns="0">
-            <a:spAutoFit/>
-          </a:bodyPr>
-          <a:lstStyle/>
-          <a:p>
-            <a:pPr algn="r">
-              <a:lnSpc>
-                <a:spcPct val="100000"/>
-              </a:lnSpc>
-            </a:pPr>
-            <a:r>
-              <a:rPr sz="1000" i="1">
-                <a:solidFill>
-                  <a:srgbClr val="5B6678"/>
-                </a:solidFill>
-                <a:latin typeface="Arial"/>
-              </a:rPr>
-              <a:t>2 / 35</a:t>
-            </a:r>
-          </a:p>
-        </p:txBody>
-      </p:sp>
     </p:spTree>
   </p:cSld>
   <p:clrMapOvr>
@@ -16994,45 +16526,6 @@
           </a:p>
         </p:txBody>
       </p:sp>
-      <p:sp>
-        <p:nvSpPr>
-          <p:cNvPr id="25" name="TextBox 24"/>
-          <p:cNvSpPr txBox="1"/>
-          <p:nvPr/>
-        </p:nvSpPr>
-        <p:spPr>
-          <a:xfrm>
-            <a:off x="11274552" y="6547104"/>
-            <a:ext cx="868680" cy="256032"/>
-          </a:xfrm>
-          <a:prstGeom prst="rect">
-            <a:avLst/>
-          </a:prstGeom>
-          <a:noFill/>
-        </p:spPr>
-        <p:txBody>
-          <a:bodyPr wrap="none" lIns="0" rIns="0" tIns="0" bIns="0">
-            <a:spAutoFit/>
-          </a:bodyPr>
-          <a:lstStyle/>
-          <a:p>
-            <a:pPr algn="r">
-              <a:lnSpc>
-                <a:spcPct val="100000"/>
-              </a:lnSpc>
-            </a:pPr>
-            <a:r>
-              <a:rPr sz="1000" i="1">
-                <a:solidFill>
-                  <a:srgbClr val="5B6678"/>
-                </a:solidFill>
-                <a:latin typeface="Arial"/>
-              </a:rPr>
-              <a:t>20 / 35</a:t>
-            </a:r>
-          </a:p>
-        </p:txBody>
-      </p:sp>
     </p:spTree>
   </p:cSld>
   <p:clrMapOvr>
@@ -17832,45 +17325,6 @@
           </a:p>
         </p:txBody>
       </p:sp>
-      <p:sp>
-        <p:nvSpPr>
-          <p:cNvPr id="21" name="TextBox 20"/>
-          <p:cNvSpPr txBox="1"/>
-          <p:nvPr/>
-        </p:nvSpPr>
-        <p:spPr>
-          <a:xfrm>
-            <a:off x="11274552" y="6547104"/>
-            <a:ext cx="868680" cy="256032"/>
-          </a:xfrm>
-          <a:prstGeom prst="rect">
-            <a:avLst/>
-          </a:prstGeom>
-          <a:noFill/>
-        </p:spPr>
-        <p:txBody>
-          <a:bodyPr wrap="none" lIns="0" rIns="0" tIns="0" bIns="0">
-            <a:spAutoFit/>
-          </a:bodyPr>
-          <a:lstStyle/>
-          <a:p>
-            <a:pPr algn="r">
-              <a:lnSpc>
-                <a:spcPct val="100000"/>
-              </a:lnSpc>
-            </a:pPr>
-            <a:r>
-              <a:rPr sz="1000" i="1">
-                <a:solidFill>
-                  <a:srgbClr val="5B6678"/>
-                </a:solidFill>
-                <a:latin typeface="Arial"/>
-              </a:rPr>
-              <a:t>21 / 35</a:t>
-            </a:r>
-          </a:p>
-        </p:txBody>
-      </p:sp>
     </p:spTree>
   </p:cSld>
   <p:clrMapOvr>
@@ -18621,45 +18075,6 @@
                 <a:hlinkClick r:id="rId3"/>
               </a:rPr>
               <a:t>Liu et al. (2023) — Lost in the Middle</a:t>
-            </a:r>
-          </a:p>
-        </p:txBody>
-      </p:sp>
-      <p:sp>
-        <p:nvSpPr>
-          <p:cNvPr id="20" name="TextBox 19"/>
-          <p:cNvSpPr txBox="1"/>
-          <p:nvPr/>
-        </p:nvSpPr>
-        <p:spPr>
-          <a:xfrm>
-            <a:off x="11274552" y="6547104"/>
-            <a:ext cx="868680" cy="256032"/>
-          </a:xfrm>
-          <a:prstGeom prst="rect">
-            <a:avLst/>
-          </a:prstGeom>
-          <a:noFill/>
-        </p:spPr>
-        <p:txBody>
-          <a:bodyPr wrap="none" lIns="0" rIns="0" tIns="0" bIns="0">
-            <a:spAutoFit/>
-          </a:bodyPr>
-          <a:lstStyle/>
-          <a:p>
-            <a:pPr algn="r">
-              <a:lnSpc>
-                <a:spcPct val="100000"/>
-              </a:lnSpc>
-            </a:pPr>
-            <a:r>
-              <a:rPr sz="1000" i="1">
-                <a:solidFill>
-                  <a:srgbClr val="5B6678"/>
-                </a:solidFill>
-                <a:latin typeface="Arial"/>
-              </a:rPr>
-              <a:t>22 / 35</a:t>
             </a:r>
           </a:p>
         </p:txBody>
@@ -19317,45 +18732,6 @@
           </a:p>
         </p:txBody>
       </p:sp>
-      <p:sp>
-        <p:nvSpPr>
-          <p:cNvPr id="17" name="TextBox 16"/>
-          <p:cNvSpPr txBox="1"/>
-          <p:nvPr/>
-        </p:nvSpPr>
-        <p:spPr>
-          <a:xfrm>
-            <a:off x="11274552" y="6547104"/>
-            <a:ext cx="868680" cy="256032"/>
-          </a:xfrm>
-          <a:prstGeom prst="rect">
-            <a:avLst/>
-          </a:prstGeom>
-          <a:noFill/>
-        </p:spPr>
-        <p:txBody>
-          <a:bodyPr wrap="none" lIns="0" rIns="0" tIns="0" bIns="0">
-            <a:spAutoFit/>
-          </a:bodyPr>
-          <a:lstStyle/>
-          <a:p>
-            <a:pPr algn="r">
-              <a:lnSpc>
-                <a:spcPct val="100000"/>
-              </a:lnSpc>
-            </a:pPr>
-            <a:r>
-              <a:rPr sz="1000" i="1">
-                <a:solidFill>
-                  <a:srgbClr val="5B6678"/>
-                </a:solidFill>
-                <a:latin typeface="Arial"/>
-              </a:rPr>
-              <a:t>23 / 35</a:t>
-            </a:r>
-          </a:p>
-        </p:txBody>
-      </p:sp>
     </p:spTree>
   </p:cSld>
   <p:clrMapOvr>
@@ -20216,45 +19592,6 @@
           </a:p>
         </p:txBody>
       </p:sp>
-      <p:sp>
-        <p:nvSpPr>
-          <p:cNvPr id="23" name="TextBox 22"/>
-          <p:cNvSpPr txBox="1"/>
-          <p:nvPr/>
-        </p:nvSpPr>
-        <p:spPr>
-          <a:xfrm>
-            <a:off x="11274552" y="6547104"/>
-            <a:ext cx="868680" cy="256032"/>
-          </a:xfrm>
-          <a:prstGeom prst="rect">
-            <a:avLst/>
-          </a:prstGeom>
-          <a:noFill/>
-        </p:spPr>
-        <p:txBody>
-          <a:bodyPr wrap="none" lIns="0" rIns="0" tIns="0" bIns="0">
-            <a:spAutoFit/>
-          </a:bodyPr>
-          <a:lstStyle/>
-          <a:p>
-            <a:pPr algn="r">
-              <a:lnSpc>
-                <a:spcPct val="100000"/>
-              </a:lnSpc>
-            </a:pPr>
-            <a:r>
-              <a:rPr sz="1000" i="1">
-                <a:solidFill>
-                  <a:srgbClr val="5B6678"/>
-                </a:solidFill>
-                <a:latin typeface="Arial"/>
-              </a:rPr>
-              <a:t>24 / 35</a:t>
-            </a:r>
-          </a:p>
-        </p:txBody>
-      </p:sp>
     </p:spTree>
   </p:cSld>
   <p:clrMapOvr>
@@ -20955,45 +20292,6 @@
           </a:p>
         </p:txBody>
       </p:sp>
-      <p:sp>
-        <p:nvSpPr>
-          <p:cNvPr id="19" name="TextBox 18"/>
-          <p:cNvSpPr txBox="1"/>
-          <p:nvPr/>
-        </p:nvSpPr>
-        <p:spPr>
-          <a:xfrm>
-            <a:off x="11274552" y="6547104"/>
-            <a:ext cx="868680" cy="256032"/>
-          </a:xfrm>
-          <a:prstGeom prst="rect">
-            <a:avLst/>
-          </a:prstGeom>
-          <a:noFill/>
-        </p:spPr>
-        <p:txBody>
-          <a:bodyPr wrap="none" lIns="0" rIns="0" tIns="0" bIns="0">
-            <a:spAutoFit/>
-          </a:bodyPr>
-          <a:lstStyle/>
-          <a:p>
-            <a:pPr algn="r">
-              <a:lnSpc>
-                <a:spcPct val="100000"/>
-              </a:lnSpc>
-            </a:pPr>
-            <a:r>
-              <a:rPr sz="1000" i="1">
-                <a:solidFill>
-                  <a:srgbClr val="5B6678"/>
-                </a:solidFill>
-                <a:latin typeface="Arial"/>
-              </a:rPr>
-              <a:t>25 / 35</a:t>
-            </a:r>
-          </a:p>
-        </p:txBody>
-      </p:sp>
     </p:spTree>
   </p:cSld>
   <p:clrMapOvr>
@@ -23292,45 +22590,6 @@
           </a:p>
         </p:txBody>
       </p:sp>
-      <p:sp>
-        <p:nvSpPr>
-          <p:cNvPr id="56" name="TextBox 55"/>
-          <p:cNvSpPr txBox="1"/>
-          <p:nvPr/>
-        </p:nvSpPr>
-        <p:spPr>
-          <a:xfrm>
-            <a:off x="11274552" y="6547104"/>
-            <a:ext cx="868680" cy="256032"/>
-          </a:xfrm>
-          <a:prstGeom prst="rect">
-            <a:avLst/>
-          </a:prstGeom>
-          <a:noFill/>
-        </p:spPr>
-        <p:txBody>
-          <a:bodyPr wrap="none" lIns="0" rIns="0" tIns="0" bIns="0">
-            <a:spAutoFit/>
-          </a:bodyPr>
-          <a:lstStyle/>
-          <a:p>
-            <a:pPr algn="r">
-              <a:lnSpc>
-                <a:spcPct val="100000"/>
-              </a:lnSpc>
-            </a:pPr>
-            <a:r>
-              <a:rPr sz="1000" i="1">
-                <a:solidFill>
-                  <a:srgbClr val="5B6678"/>
-                </a:solidFill>
-                <a:latin typeface="Arial"/>
-              </a:rPr>
-              <a:t>26 / 35</a:t>
-            </a:r>
-          </a:p>
-        </p:txBody>
-      </p:sp>
     </p:spTree>
   </p:cSld>
   <p:clrMapOvr>
@@ -24371,45 +23630,6 @@
           </a:p>
         </p:txBody>
       </p:sp>
-      <p:sp>
-        <p:nvSpPr>
-          <p:cNvPr id="26" name="TextBox 25"/>
-          <p:cNvSpPr txBox="1"/>
-          <p:nvPr/>
-        </p:nvSpPr>
-        <p:spPr>
-          <a:xfrm>
-            <a:off x="11274552" y="6547104"/>
-            <a:ext cx="868680" cy="256032"/>
-          </a:xfrm>
-          <a:prstGeom prst="rect">
-            <a:avLst/>
-          </a:prstGeom>
-          <a:noFill/>
-        </p:spPr>
-        <p:txBody>
-          <a:bodyPr wrap="none" lIns="0" rIns="0" tIns="0" bIns="0">
-            <a:spAutoFit/>
-          </a:bodyPr>
-          <a:lstStyle/>
-          <a:p>
-            <a:pPr algn="r">
-              <a:lnSpc>
-                <a:spcPct val="100000"/>
-              </a:lnSpc>
-            </a:pPr>
-            <a:r>
-              <a:rPr sz="1000" i="1">
-                <a:solidFill>
-                  <a:srgbClr val="5B6678"/>
-                </a:solidFill>
-                <a:latin typeface="Arial"/>
-              </a:rPr>
-              <a:t>27 / 35</a:t>
-            </a:r>
-          </a:p>
-        </p:txBody>
-      </p:sp>
     </p:spTree>
   </p:cSld>
   <p:clrMapOvr>
@@ -25887,45 +25107,6 @@
                 <a:hlinkClick r:id="rId2"/>
               </a:rPr>
               <a:t>Mistral AI — Mistral 7B</a:t>
-            </a:r>
-          </a:p>
-        </p:txBody>
-      </p:sp>
-      <p:sp>
-        <p:nvSpPr>
-          <p:cNvPr id="37" name="TextBox 36"/>
-          <p:cNvSpPr txBox="1"/>
-          <p:nvPr/>
-        </p:nvSpPr>
-        <p:spPr>
-          <a:xfrm>
-            <a:off x="11274552" y="6547104"/>
-            <a:ext cx="868680" cy="256032"/>
-          </a:xfrm>
-          <a:prstGeom prst="rect">
-            <a:avLst/>
-          </a:prstGeom>
-          <a:noFill/>
-        </p:spPr>
-        <p:txBody>
-          <a:bodyPr wrap="none" lIns="0" rIns="0" tIns="0" bIns="0">
-            <a:spAutoFit/>
-          </a:bodyPr>
-          <a:lstStyle/>
-          <a:p>
-            <a:pPr algn="r">
-              <a:lnSpc>
-                <a:spcPct val="100000"/>
-              </a:lnSpc>
-            </a:pPr>
-            <a:r>
-              <a:rPr sz="1000" i="1">
-                <a:solidFill>
-                  <a:srgbClr val="5B6678"/>
-                </a:solidFill>
-                <a:latin typeface="Arial"/>
-              </a:rPr>
-              <a:t>28 / 35</a:t>
             </a:r>
           </a:p>
         </p:txBody>
@@ -26583,45 +25764,6 @@
           </a:p>
         </p:txBody>
       </p:sp>
-      <p:sp>
-        <p:nvSpPr>
-          <p:cNvPr id="17" name="TextBox 16"/>
-          <p:cNvSpPr txBox="1"/>
-          <p:nvPr/>
-        </p:nvSpPr>
-        <p:spPr>
-          <a:xfrm>
-            <a:off x="11274552" y="6547104"/>
-            <a:ext cx="868680" cy="256032"/>
-          </a:xfrm>
-          <a:prstGeom prst="rect">
-            <a:avLst/>
-          </a:prstGeom>
-          <a:noFill/>
-        </p:spPr>
-        <p:txBody>
-          <a:bodyPr wrap="none" lIns="0" rIns="0" tIns="0" bIns="0">
-            <a:spAutoFit/>
-          </a:bodyPr>
-          <a:lstStyle/>
-          <a:p>
-            <a:pPr algn="r">
-              <a:lnSpc>
-                <a:spcPct val="100000"/>
-              </a:lnSpc>
-            </a:pPr>
-            <a:r>
-              <a:rPr sz="1000" i="1">
-                <a:solidFill>
-                  <a:srgbClr val="5B6678"/>
-                </a:solidFill>
-                <a:latin typeface="Arial"/>
-              </a:rPr>
-              <a:t>29 / 35</a:t>
-            </a:r>
-          </a:p>
-        </p:txBody>
-      </p:sp>
     </p:spTree>
   </p:cSld>
   <p:clrMapOvr>
@@ -27683,45 +26825,6 @@
           </a:p>
         </p:txBody>
       </p:sp>
-      <p:sp>
-        <p:nvSpPr>
-          <p:cNvPr id="27" name="TextBox 26"/>
-          <p:cNvSpPr txBox="1"/>
-          <p:nvPr/>
-        </p:nvSpPr>
-        <p:spPr>
-          <a:xfrm>
-            <a:off x="11274552" y="6547104"/>
-            <a:ext cx="868680" cy="256032"/>
-          </a:xfrm>
-          <a:prstGeom prst="rect">
-            <a:avLst/>
-          </a:prstGeom>
-          <a:noFill/>
-        </p:spPr>
-        <p:txBody>
-          <a:bodyPr wrap="none" lIns="0" rIns="0" tIns="0" bIns="0">
-            <a:spAutoFit/>
-          </a:bodyPr>
-          <a:lstStyle/>
-          <a:p>
-            <a:pPr algn="r">
-              <a:lnSpc>
-                <a:spcPct val="100000"/>
-              </a:lnSpc>
-            </a:pPr>
-            <a:r>
-              <a:rPr sz="1000" i="1">
-                <a:solidFill>
-                  <a:srgbClr val="5B6678"/>
-                </a:solidFill>
-                <a:latin typeface="Arial"/>
-              </a:rPr>
-              <a:t>3 / 35</a:t>
-            </a:r>
-          </a:p>
-        </p:txBody>
-      </p:sp>
     </p:spTree>
   </p:cSld>
   <p:clrMapOvr>
@@ -28933,45 +28036,6 @@
           </a:p>
         </p:txBody>
       </p:sp>
-      <p:sp>
-        <p:nvSpPr>
-          <p:cNvPr id="32" name="TextBox 31"/>
-          <p:cNvSpPr txBox="1"/>
-          <p:nvPr/>
-        </p:nvSpPr>
-        <p:spPr>
-          <a:xfrm>
-            <a:off x="11274552" y="6547104"/>
-            <a:ext cx="868680" cy="256032"/>
-          </a:xfrm>
-          <a:prstGeom prst="rect">
-            <a:avLst/>
-          </a:prstGeom>
-          <a:noFill/>
-        </p:spPr>
-        <p:txBody>
-          <a:bodyPr wrap="none" lIns="0" rIns="0" tIns="0" bIns="0">
-            <a:spAutoFit/>
-          </a:bodyPr>
-          <a:lstStyle/>
-          <a:p>
-            <a:pPr algn="r">
-              <a:lnSpc>
-                <a:spcPct val="100000"/>
-              </a:lnSpc>
-            </a:pPr>
-            <a:r>
-              <a:rPr sz="1000" i="1">
-                <a:solidFill>
-                  <a:srgbClr val="5B6678"/>
-                </a:solidFill>
-                <a:latin typeface="Arial"/>
-              </a:rPr>
-              <a:t>30 / 35</a:t>
-            </a:r>
-          </a:p>
-        </p:txBody>
-      </p:sp>
     </p:spTree>
   </p:cSld>
   <p:clrMapOvr>
@@ -29734,45 +28798,6 @@
           </a:p>
         </p:txBody>
       </p:sp>
-      <p:sp>
-        <p:nvSpPr>
-          <p:cNvPr id="21" name="TextBox 20"/>
-          <p:cNvSpPr txBox="1"/>
-          <p:nvPr/>
-        </p:nvSpPr>
-        <p:spPr>
-          <a:xfrm>
-            <a:off x="11274552" y="6547104"/>
-            <a:ext cx="868680" cy="256032"/>
-          </a:xfrm>
-          <a:prstGeom prst="rect">
-            <a:avLst/>
-          </a:prstGeom>
-          <a:noFill/>
-        </p:spPr>
-        <p:txBody>
-          <a:bodyPr wrap="none" lIns="0" rIns="0" tIns="0" bIns="0">
-            <a:spAutoFit/>
-          </a:bodyPr>
-          <a:lstStyle/>
-          <a:p>
-            <a:pPr algn="r">
-              <a:lnSpc>
-                <a:spcPct val="100000"/>
-              </a:lnSpc>
-            </a:pPr>
-            <a:r>
-              <a:rPr sz="1000" i="1">
-                <a:solidFill>
-                  <a:srgbClr val="5B6678"/>
-                </a:solidFill>
-                <a:latin typeface="Arial"/>
-              </a:rPr>
-              <a:t>31 / 35</a:t>
-            </a:r>
-          </a:p>
-        </p:txBody>
-      </p:sp>
     </p:spTree>
   </p:cSld>
   <p:clrMapOvr>
@@ -30975,45 +30000,6 @@
           </a:p>
         </p:txBody>
       </p:sp>
-      <p:sp>
-        <p:nvSpPr>
-          <p:cNvPr id="31" name="TextBox 30"/>
-          <p:cNvSpPr txBox="1"/>
-          <p:nvPr/>
-        </p:nvSpPr>
-        <p:spPr>
-          <a:xfrm>
-            <a:off x="11274552" y="6547104"/>
-            <a:ext cx="868680" cy="256032"/>
-          </a:xfrm>
-          <a:prstGeom prst="rect">
-            <a:avLst/>
-          </a:prstGeom>
-          <a:noFill/>
-        </p:spPr>
-        <p:txBody>
-          <a:bodyPr wrap="none" lIns="0" rIns="0" tIns="0" bIns="0">
-            <a:spAutoFit/>
-          </a:bodyPr>
-          <a:lstStyle/>
-          <a:p>
-            <a:pPr algn="r">
-              <a:lnSpc>
-                <a:spcPct val="100000"/>
-              </a:lnSpc>
-            </a:pPr>
-            <a:r>
-              <a:rPr sz="1000" i="1">
-                <a:solidFill>
-                  <a:srgbClr val="5B6678"/>
-                </a:solidFill>
-                <a:latin typeface="Arial"/>
-              </a:rPr>
-              <a:t>32 / 35</a:t>
-            </a:r>
-          </a:p>
-        </p:txBody>
-      </p:sp>
     </p:spTree>
   </p:cSld>
   <p:clrMapOvr>
@@ -31626,45 +30612,6 @@
           </a:p>
         </p:txBody>
       </p:sp>
-      <p:sp>
-        <p:nvSpPr>
-          <p:cNvPr id="17" name="TextBox 16"/>
-          <p:cNvSpPr txBox="1"/>
-          <p:nvPr/>
-        </p:nvSpPr>
-        <p:spPr>
-          <a:xfrm>
-            <a:off x="11274552" y="6547104"/>
-            <a:ext cx="868680" cy="256032"/>
-          </a:xfrm>
-          <a:prstGeom prst="rect">
-            <a:avLst/>
-          </a:prstGeom>
-          <a:noFill/>
-        </p:spPr>
-        <p:txBody>
-          <a:bodyPr wrap="none" lIns="0" rIns="0" tIns="0" bIns="0">
-            <a:spAutoFit/>
-          </a:bodyPr>
-          <a:lstStyle/>
-          <a:p>
-            <a:pPr algn="r">
-              <a:lnSpc>
-                <a:spcPct val="100000"/>
-              </a:lnSpc>
-            </a:pPr>
-            <a:r>
-              <a:rPr sz="1000" i="1">
-                <a:solidFill>
-                  <a:srgbClr val="5B6678"/>
-                </a:solidFill>
-                <a:latin typeface="Arial"/>
-              </a:rPr>
-              <a:t>33 / 35</a:t>
-            </a:r>
-          </a:p>
-        </p:txBody>
-      </p:sp>
     </p:spTree>
   </p:cSld>
   <p:clrMapOvr>
@@ -32651,45 +31598,6 @@
                 <a:hlinkClick r:id="rId8"/>
               </a:rPr>
               <a:t>Yao et al. (2022) — ReAct</a:t>
-            </a:r>
-          </a:p>
-        </p:txBody>
-      </p:sp>
-      <p:sp>
-        <p:nvSpPr>
-          <p:cNvPr id="25" name="TextBox 24"/>
-          <p:cNvSpPr txBox="1"/>
-          <p:nvPr/>
-        </p:nvSpPr>
-        <p:spPr>
-          <a:xfrm>
-            <a:off x="11274552" y="6547104"/>
-            <a:ext cx="868680" cy="256032"/>
-          </a:xfrm>
-          <a:prstGeom prst="rect">
-            <a:avLst/>
-          </a:prstGeom>
-          <a:noFill/>
-        </p:spPr>
-        <p:txBody>
-          <a:bodyPr wrap="none" lIns="0" rIns="0" tIns="0" bIns="0">
-            <a:spAutoFit/>
-          </a:bodyPr>
-          <a:lstStyle/>
-          <a:p>
-            <a:pPr algn="r">
-              <a:lnSpc>
-                <a:spcPct val="100000"/>
-              </a:lnSpc>
-            </a:pPr>
-            <a:r>
-              <a:rPr sz="1000" i="1">
-                <a:solidFill>
-                  <a:srgbClr val="5B6678"/>
-                </a:solidFill>
-                <a:latin typeface="Arial"/>
-              </a:rPr>
-              <a:t>34 / 35</a:t>
             </a:r>
           </a:p>
         </p:txBody>
@@ -32837,45 +31745,6 @@
           </a:p>
         </p:txBody>
       </p:sp>
-      <p:sp>
-        <p:nvSpPr>
-          <p:cNvPr id="5" name="TextBox 4"/>
-          <p:cNvSpPr txBox="1"/>
-          <p:nvPr/>
-        </p:nvSpPr>
-        <p:spPr>
-          <a:xfrm>
-            <a:off x="11274552" y="6547104"/>
-            <a:ext cx="868680" cy="256032"/>
-          </a:xfrm>
-          <a:prstGeom prst="rect">
-            <a:avLst/>
-          </a:prstGeom>
-          <a:noFill/>
-        </p:spPr>
-        <p:txBody>
-          <a:bodyPr wrap="none" lIns="0" rIns="0" tIns="0" bIns="0">
-            <a:spAutoFit/>
-          </a:bodyPr>
-          <a:lstStyle/>
-          <a:p>
-            <a:pPr algn="r">
-              <a:lnSpc>
-                <a:spcPct val="100000"/>
-              </a:lnSpc>
-            </a:pPr>
-            <a:r>
-              <a:rPr sz="1000" i="1">
-                <a:solidFill>
-                  <a:srgbClr val="5B6678"/>
-                </a:solidFill>
-                <a:latin typeface="Arial"/>
-              </a:rPr>
-              <a:t>35 / 35</a:t>
-            </a:r>
-          </a:p>
-        </p:txBody>
-      </p:sp>
     </p:spTree>
   </p:cSld>
   <p:clrMapOvr>
@@ -33573,45 +32442,6 @@
           </a:p>
         </p:txBody>
       </p:sp>
-      <p:sp>
-        <p:nvSpPr>
-          <p:cNvPr id="18" name="TextBox 17"/>
-          <p:cNvSpPr txBox="1"/>
-          <p:nvPr/>
-        </p:nvSpPr>
-        <p:spPr>
-          <a:xfrm>
-            <a:off x="11274552" y="6547104"/>
-            <a:ext cx="868680" cy="256032"/>
-          </a:xfrm>
-          <a:prstGeom prst="rect">
-            <a:avLst/>
-          </a:prstGeom>
-          <a:noFill/>
-        </p:spPr>
-        <p:txBody>
-          <a:bodyPr wrap="none" lIns="0" rIns="0" tIns="0" bIns="0">
-            <a:spAutoFit/>
-          </a:bodyPr>
-          <a:lstStyle/>
-          <a:p>
-            <a:pPr algn="r">
-              <a:lnSpc>
-                <a:spcPct val="100000"/>
-              </a:lnSpc>
-            </a:pPr>
-            <a:r>
-              <a:rPr sz="1000" i="1">
-                <a:solidFill>
-                  <a:srgbClr val="5B6678"/>
-                </a:solidFill>
-                <a:latin typeface="Arial"/>
-              </a:rPr>
-              <a:t>4 / 35</a:t>
-            </a:r>
-          </a:p>
-        </p:txBody>
-      </p:sp>
     </p:spTree>
   </p:cSld>
   <p:clrMapOvr>
@@ -34476,45 +33306,6 @@
                 <a:latin typeface="Arial"/>
               </a:rPr>
               <a:t>→ Section 4 — sampling</a:t>
-            </a:r>
-          </a:p>
-        </p:txBody>
-      </p:sp>
-      <p:sp>
-        <p:nvSpPr>
-          <p:cNvPr id="22" name="TextBox 21"/>
-          <p:cNvSpPr txBox="1"/>
-          <p:nvPr/>
-        </p:nvSpPr>
-        <p:spPr>
-          <a:xfrm>
-            <a:off x="11274552" y="6547104"/>
-            <a:ext cx="868680" cy="256032"/>
-          </a:xfrm>
-          <a:prstGeom prst="rect">
-            <a:avLst/>
-          </a:prstGeom>
-          <a:noFill/>
-        </p:spPr>
-        <p:txBody>
-          <a:bodyPr wrap="none" lIns="0" rIns="0" tIns="0" bIns="0">
-            <a:spAutoFit/>
-          </a:bodyPr>
-          <a:lstStyle/>
-          <a:p>
-            <a:pPr algn="r">
-              <a:lnSpc>
-                <a:spcPct val="100000"/>
-              </a:lnSpc>
-            </a:pPr>
-            <a:r>
-              <a:rPr sz="1000" i="1">
-                <a:solidFill>
-                  <a:srgbClr val="5B6678"/>
-                </a:solidFill>
-                <a:latin typeface="Arial"/>
-              </a:rPr>
-              <a:t>5 / 35</a:t>
             </a:r>
           </a:p>
         </p:txBody>
@@ -35172,45 +33963,6 @@
           </a:p>
         </p:txBody>
       </p:sp>
-      <p:sp>
-        <p:nvSpPr>
-          <p:cNvPr id="17" name="TextBox 16"/>
-          <p:cNvSpPr txBox="1"/>
-          <p:nvPr/>
-        </p:nvSpPr>
-        <p:spPr>
-          <a:xfrm>
-            <a:off x="11274552" y="6547104"/>
-            <a:ext cx="868680" cy="256032"/>
-          </a:xfrm>
-          <a:prstGeom prst="rect">
-            <a:avLst/>
-          </a:prstGeom>
-          <a:noFill/>
-        </p:spPr>
-        <p:txBody>
-          <a:bodyPr wrap="none" lIns="0" rIns="0" tIns="0" bIns="0">
-            <a:spAutoFit/>
-          </a:bodyPr>
-          <a:lstStyle/>
-          <a:p>
-            <a:pPr algn="r">
-              <a:lnSpc>
-                <a:spcPct val="100000"/>
-              </a:lnSpc>
-            </a:pPr>
-            <a:r>
-              <a:rPr sz="1000" i="1">
-                <a:solidFill>
-                  <a:srgbClr val="5B6678"/>
-                </a:solidFill>
-                <a:latin typeface="Arial"/>
-              </a:rPr>
-              <a:t>6 / 35</a:t>
-            </a:r>
-          </a:p>
-        </p:txBody>
-      </p:sp>
     </p:spTree>
   </p:cSld>
   <p:clrMapOvr>
@@ -35466,45 +34218,6 @@
           </a:p>
         </p:txBody>
       </p:sp>
-      <p:sp>
-        <p:nvSpPr>
-          <p:cNvPr id="8" name="TextBox 7"/>
-          <p:cNvSpPr txBox="1"/>
-          <p:nvPr/>
-        </p:nvSpPr>
-        <p:spPr>
-          <a:xfrm>
-            <a:off x="11274552" y="6547104"/>
-            <a:ext cx="868680" cy="256032"/>
-          </a:xfrm>
-          <a:prstGeom prst="rect">
-            <a:avLst/>
-          </a:prstGeom>
-          <a:noFill/>
-        </p:spPr>
-        <p:txBody>
-          <a:bodyPr wrap="none" lIns="0" rIns="0" tIns="0" bIns="0">
-            <a:spAutoFit/>
-          </a:bodyPr>
-          <a:lstStyle/>
-          <a:p>
-            <a:pPr algn="r">
-              <a:lnSpc>
-                <a:spcPct val="100000"/>
-              </a:lnSpc>
-            </a:pPr>
-            <a:r>
-              <a:rPr sz="1000" i="1">
-                <a:solidFill>
-                  <a:srgbClr val="5B6678"/>
-                </a:solidFill>
-                <a:latin typeface="Arial"/>
-              </a:rPr>
-              <a:t>7 / 35</a:t>
-            </a:r>
-          </a:p>
-        </p:txBody>
-      </p:sp>
     </p:spTree>
   </p:cSld>
   <p:clrMapOvr>
@@ -36669,45 +35382,6 @@
           </a:p>
         </p:txBody>
       </p:sp>
-      <p:sp>
-        <p:nvSpPr>
-          <p:cNvPr id="28" name="TextBox 27"/>
-          <p:cNvSpPr txBox="1"/>
-          <p:nvPr/>
-        </p:nvSpPr>
-        <p:spPr>
-          <a:xfrm>
-            <a:off x="11274552" y="6547104"/>
-            <a:ext cx="868680" cy="256032"/>
-          </a:xfrm>
-          <a:prstGeom prst="rect">
-            <a:avLst/>
-          </a:prstGeom>
-          <a:noFill/>
-        </p:spPr>
-        <p:txBody>
-          <a:bodyPr wrap="none" lIns="0" rIns="0" tIns="0" bIns="0">
-            <a:spAutoFit/>
-          </a:bodyPr>
-          <a:lstStyle/>
-          <a:p>
-            <a:pPr algn="r">
-              <a:lnSpc>
-                <a:spcPct val="100000"/>
-              </a:lnSpc>
-            </a:pPr>
-            <a:r>
-              <a:rPr sz="1000" i="1">
-                <a:solidFill>
-                  <a:srgbClr val="5B6678"/>
-                </a:solidFill>
-                <a:latin typeface="Arial"/>
-              </a:rPr>
-              <a:t>8 / 35</a:t>
-            </a:r>
-          </a:p>
-        </p:txBody>
-      </p:sp>
     </p:spTree>
   </p:cSld>
   <p:clrMapOvr>
@@ -37969,45 +36643,6 @@
                 <a:hlinkClick r:id="rId2"/>
               </a:rPr>
               <a:t>Sennrich et al. (2016) — NMT of Rare Words / BPE</a:t>
-            </a:r>
-          </a:p>
-        </p:txBody>
-      </p:sp>
-      <p:sp>
-        <p:nvSpPr>
-          <p:cNvPr id="31" name="TextBox 30"/>
-          <p:cNvSpPr txBox="1"/>
-          <p:nvPr/>
-        </p:nvSpPr>
-        <p:spPr>
-          <a:xfrm>
-            <a:off x="11274552" y="6547104"/>
-            <a:ext cx="868680" cy="256032"/>
-          </a:xfrm>
-          <a:prstGeom prst="rect">
-            <a:avLst/>
-          </a:prstGeom>
-          <a:noFill/>
-        </p:spPr>
-        <p:txBody>
-          <a:bodyPr wrap="none" lIns="0" rIns="0" tIns="0" bIns="0">
-            <a:spAutoFit/>
-          </a:bodyPr>
-          <a:lstStyle/>
-          <a:p>
-            <a:pPr algn="r">
-              <a:lnSpc>
-                <a:spcPct val="100000"/>
-              </a:lnSpc>
-            </a:pPr>
-            <a:r>
-              <a:rPr sz="1000" i="1">
-                <a:solidFill>
-                  <a:srgbClr val="5B6678"/>
-                </a:solidFill>
-                <a:latin typeface="Arial"/>
-              </a:rPr>
-              <a:t>9 / 35</a:t>
             </a:r>
           </a:p>
         </p:txBody>
